--- a/25070521106_MaithiliDafale_PPT.pptx
+++ b/25070521106_MaithiliDafale_PPT.pptx
@@ -6879,7 +6879,7 @@
         </p:nvSpPr>
         <p:spPr>
           <a:xfrm>
-            <a:off x="457189" y="465405"/>
+            <a:off x="457189" y="325447"/>
             <a:ext cx="11734506" cy="176709"/>
           </a:xfrm>
           <a:prstGeom prst="rect">
@@ -6921,7 +6921,7 @@
         </p:nvSpPr>
         <p:spPr>
           <a:xfrm>
-            <a:off x="457188" y="780288"/>
+            <a:off x="457188" y="583891"/>
             <a:ext cx="11277318" cy="450354"/>
           </a:xfrm>
           <a:prstGeom prst="rect">
@@ -6954,424 +6954,6 @@
       </p:sp>
       <p:grpSp>
         <p:nvGrpSpPr>
-          <p:cNvPr id="40" name="Group 39">
-            <a:extLst>
-              <a:ext uri="{FF2B5EF4-FFF2-40B4-BE49-F238E27FC236}">
-                <a16:creationId xmlns:a16="http://schemas.microsoft.com/office/drawing/2014/main" id="{5DA252DE-FEF7-B003-D93E-191EE65E33C5}"/>
-              </a:ext>
-            </a:extLst>
-          </p:cNvPr>
-          <p:cNvGrpSpPr/>
-          <p:nvPr/>
-        </p:nvGrpSpPr>
-        <p:grpSpPr>
-          <a:xfrm>
-            <a:off x="457189" y="1446709"/>
-            <a:ext cx="826769" cy="323552"/>
-            <a:chOff x="457189" y="1446709"/>
-            <a:chExt cx="826769" cy="323552"/>
-          </a:xfrm>
-        </p:grpSpPr>
-        <p:sp>
-          <p:nvSpPr>
-            <p:cNvPr id="4" name="Shape 2"/>
-            <p:cNvSpPr/>
-            <p:nvPr/>
-          </p:nvSpPr>
-          <p:spPr>
-            <a:xfrm>
-              <a:off x="457189" y="1446709"/>
-              <a:ext cx="323544" cy="323552"/>
-            </a:xfrm>
-            <a:prstGeom prst="roundRect">
-              <a:avLst>
-                <a:gd name="adj" fmla="val 17148"/>
-              </a:avLst>
-            </a:prstGeom>
-            <a:solidFill>
-              <a:srgbClr val="B8D8BA"/>
-            </a:solidFill>
-            <a:ln w="6350">
-              <a:solidFill>
-                <a:srgbClr val="D3CEBA"/>
-              </a:solidFill>
-              <a:prstDash val="solid"/>
-            </a:ln>
-          </p:spPr>
-        </p:sp>
-        <p:sp>
-          <p:nvSpPr>
-            <p:cNvPr id="5" name="Text 3"/>
-            <p:cNvSpPr/>
-            <p:nvPr/>
-          </p:nvSpPr>
-          <p:spPr>
-            <a:xfrm>
-              <a:off x="563449" y="1515963"/>
-              <a:ext cx="720509" cy="184944"/>
-            </a:xfrm>
-            <a:prstGeom prst="rect">
-              <a:avLst/>
-            </a:prstGeom>
-            <a:noFill/>
-            <a:ln/>
-          </p:spPr>
-          <p:txBody>
-            <a:bodyPr wrap="none" lIns="0" tIns="0" rIns="0" bIns="0" rtlCol="0" anchor="t"/>
-            <a:lstStyle/>
-            <a:p>
-              <a:pPr marL="0" indent="0" algn="l">
-                <a:lnSpc>
-                  <a:spcPct val="83000"/>
-                </a:lnSpc>
-                <a:buNone/>
-              </a:pPr>
-              <a:r>
-                <a:rPr lang="en-US" sz="1450" dirty="0">
-                  <a:solidFill>
-                    <a:srgbClr val="000000"/>
-                  </a:solidFill>
-                  <a:latin typeface="IBM Plex Sans SemiBold" pitchFamily="34" charset="0"/>
-                  <a:ea typeface="IBM Plex Sans SemiBold" pitchFamily="34" charset="-122"/>
-                  <a:cs typeface="IBM Plex Sans SemiBold" pitchFamily="34" charset="-120"/>
-                </a:rPr>
-                <a:t>1</a:t>
-              </a:r>
-              <a:endParaRPr lang="en-US" sz="1450" dirty="0"/>
-            </a:p>
-          </p:txBody>
-        </p:sp>
-      </p:grpSp>
-      <p:sp>
-        <p:nvSpPr>
-          <p:cNvPr id="6" name="Text 4"/>
-          <p:cNvSpPr/>
-          <p:nvPr/>
-        </p:nvSpPr>
-        <p:spPr>
-          <a:xfrm>
-            <a:off x="965573" y="1501913"/>
-            <a:ext cx="5709400" cy="240308"/>
-          </a:xfrm>
-          <a:prstGeom prst="rect">
-            <a:avLst/>
-          </a:prstGeom>
-          <a:noFill/>
-          <a:ln/>
-        </p:spPr>
-        <p:txBody>
-          <a:bodyPr wrap="none" lIns="0" tIns="0" rIns="0" bIns="0" rtlCol="0" anchor="t"/>
-          <a:lstStyle/>
-          <a:p>
-            <a:pPr marL="0" indent="0" algn="l">
-              <a:lnSpc>
-                <a:spcPct val="108000"/>
-              </a:lnSpc>
-              <a:buNone/>
-            </a:pPr>
-            <a:r>
-              <a:rPr lang="en-US" sz="1450" b="1" dirty="0">
-                <a:solidFill>
-                  <a:srgbClr val="4D5B42"/>
-                </a:solidFill>
-                <a:latin typeface="IBM Plex Sans Bold" pitchFamily="34" charset="0"/>
-                <a:ea typeface="IBM Plex Sans Bold" pitchFamily="34" charset="-122"/>
-                <a:cs typeface="IBM Plex Sans Bold" pitchFamily="34" charset="-120"/>
-              </a:rPr>
-              <a:t>Compare</a:t>
-            </a:r>
-            <a:r>
-              <a:rPr lang="en-US" sz="1450" dirty="0">
-                <a:solidFill>
-                  <a:srgbClr val="4D5B42"/>
-                </a:solidFill>
-                <a:latin typeface="IBM Plex Sans" pitchFamily="34" charset="0"/>
-                <a:ea typeface="IBM Plex Sans" pitchFamily="34" charset="-122"/>
-                <a:cs typeface="IBM Plex Sans" pitchFamily="34" charset="-120"/>
-              </a:rPr>
-              <a:t> the first unprocessed elements of two sorted subarrays.</a:t>
-            </a:r>
-            <a:endParaRPr lang="en-US" sz="1450" dirty="0"/>
-          </a:p>
-        </p:txBody>
-      </p:sp>
-      <p:grpSp>
-        <p:nvGrpSpPr>
-          <p:cNvPr id="41" name="Group 40">
-            <a:extLst>
-              <a:ext uri="{FF2B5EF4-FFF2-40B4-BE49-F238E27FC236}">
-                <a16:creationId xmlns:a16="http://schemas.microsoft.com/office/drawing/2014/main" id="{209FB303-5C55-010A-83CD-A6943384CD8D}"/>
-              </a:ext>
-            </a:extLst>
-          </p:cNvPr>
-          <p:cNvGrpSpPr/>
-          <p:nvPr/>
-        </p:nvGrpSpPr>
-        <p:grpSpPr>
-          <a:xfrm>
-            <a:off x="457189" y="2323306"/>
-            <a:ext cx="826769" cy="323552"/>
-            <a:chOff x="457189" y="2323306"/>
-            <a:chExt cx="826769" cy="323552"/>
-          </a:xfrm>
-        </p:grpSpPr>
-        <p:sp>
-          <p:nvSpPr>
-            <p:cNvPr id="7" name="Shape 5"/>
-            <p:cNvSpPr/>
-            <p:nvPr/>
-          </p:nvSpPr>
-          <p:spPr>
-            <a:xfrm>
-              <a:off x="457189" y="2323306"/>
-              <a:ext cx="323544" cy="323552"/>
-            </a:xfrm>
-            <a:prstGeom prst="roundRect">
-              <a:avLst>
-                <a:gd name="adj" fmla="val 17148"/>
-              </a:avLst>
-            </a:prstGeom>
-            <a:solidFill>
-              <a:srgbClr val="B8D8BA"/>
-            </a:solidFill>
-            <a:ln w="6350">
-              <a:solidFill>
-                <a:srgbClr val="D3CEBA"/>
-              </a:solidFill>
-              <a:prstDash val="solid"/>
-            </a:ln>
-          </p:spPr>
-        </p:sp>
-        <p:sp>
-          <p:nvSpPr>
-            <p:cNvPr id="8" name="Text 6"/>
-            <p:cNvSpPr/>
-            <p:nvPr/>
-          </p:nvSpPr>
-          <p:spPr>
-            <a:xfrm>
-              <a:off x="563449" y="2392561"/>
-              <a:ext cx="720509" cy="184944"/>
-            </a:xfrm>
-            <a:prstGeom prst="rect">
-              <a:avLst/>
-            </a:prstGeom>
-            <a:noFill/>
-            <a:ln/>
-          </p:spPr>
-          <p:txBody>
-            <a:bodyPr wrap="none" lIns="0" tIns="0" rIns="0" bIns="0" rtlCol="0" anchor="t"/>
-            <a:lstStyle/>
-            <a:p>
-              <a:pPr marL="0" indent="0" algn="l">
-                <a:lnSpc>
-                  <a:spcPct val="83000"/>
-                </a:lnSpc>
-                <a:buNone/>
-              </a:pPr>
-              <a:r>
-                <a:rPr lang="en-US" sz="1450" dirty="0">
-                  <a:solidFill>
-                    <a:srgbClr val="000000"/>
-                  </a:solidFill>
-                  <a:latin typeface="IBM Plex Sans SemiBold" pitchFamily="34" charset="0"/>
-                  <a:ea typeface="IBM Plex Sans SemiBold" pitchFamily="34" charset="-122"/>
-                  <a:cs typeface="IBM Plex Sans SemiBold" pitchFamily="34" charset="-120"/>
-                </a:rPr>
-                <a:t>2</a:t>
-              </a:r>
-              <a:endParaRPr lang="en-US" sz="1450" dirty="0"/>
-            </a:p>
-          </p:txBody>
-        </p:sp>
-      </p:grpSp>
-      <p:sp>
-        <p:nvSpPr>
-          <p:cNvPr id="9" name="Text 7"/>
-          <p:cNvSpPr/>
-          <p:nvPr/>
-        </p:nvSpPr>
-        <p:spPr>
-          <a:xfrm>
-            <a:off x="965573" y="2378511"/>
-            <a:ext cx="5709400" cy="240308"/>
-          </a:xfrm>
-          <a:prstGeom prst="rect">
-            <a:avLst/>
-          </a:prstGeom>
-          <a:noFill/>
-          <a:ln/>
-        </p:spPr>
-        <p:txBody>
-          <a:bodyPr wrap="none" lIns="0" tIns="0" rIns="0" bIns="0" rtlCol="0" anchor="t"/>
-          <a:lstStyle/>
-          <a:p>
-            <a:pPr marL="0" indent="0" algn="l">
-              <a:lnSpc>
-                <a:spcPct val="108000"/>
-              </a:lnSpc>
-              <a:buNone/>
-            </a:pPr>
-            <a:r>
-              <a:rPr lang="en-US" sz="1450" b="1" dirty="0">
-                <a:solidFill>
-                  <a:srgbClr val="4D5B42"/>
-                </a:solidFill>
-                <a:latin typeface="IBM Plex Sans Bold" pitchFamily="34" charset="0"/>
-                <a:ea typeface="IBM Plex Sans Bold" pitchFamily="34" charset="-122"/>
-                <a:cs typeface="IBM Plex Sans Bold" pitchFamily="34" charset="-120"/>
-              </a:rPr>
-              <a:t>Copy</a:t>
-            </a:r>
-            <a:r>
-              <a:rPr lang="en-US" sz="1450" dirty="0">
-                <a:solidFill>
-                  <a:srgbClr val="4D5B42"/>
-                </a:solidFill>
-                <a:latin typeface="IBM Plex Sans" pitchFamily="34" charset="0"/>
-                <a:ea typeface="IBM Plex Sans" pitchFamily="34" charset="-122"/>
-                <a:cs typeface="IBM Plex Sans" pitchFamily="34" charset="-120"/>
-              </a:rPr>
-              <a:t> the smaller element to the output.</a:t>
-            </a:r>
-            <a:endParaRPr lang="en-US" sz="1450" dirty="0"/>
-          </a:p>
-        </p:txBody>
-      </p:sp>
-      <p:grpSp>
-        <p:nvGrpSpPr>
-          <p:cNvPr id="43" name="Group 42">
-            <a:extLst>
-              <a:ext uri="{FF2B5EF4-FFF2-40B4-BE49-F238E27FC236}">
-                <a16:creationId xmlns:a16="http://schemas.microsoft.com/office/drawing/2014/main" id="{A34BF55F-0BB3-49EC-9A1C-AF591C8F962D}"/>
-              </a:ext>
-            </a:extLst>
-          </p:cNvPr>
-          <p:cNvGrpSpPr/>
-          <p:nvPr/>
-        </p:nvGrpSpPr>
-        <p:grpSpPr>
-          <a:xfrm>
-            <a:off x="457189" y="3199904"/>
-            <a:ext cx="826769" cy="323552"/>
-            <a:chOff x="457189" y="3199904"/>
-            <a:chExt cx="826769" cy="323552"/>
-          </a:xfrm>
-        </p:grpSpPr>
-        <p:sp>
-          <p:nvSpPr>
-            <p:cNvPr id="10" name="Shape 8"/>
-            <p:cNvSpPr/>
-            <p:nvPr/>
-          </p:nvSpPr>
-          <p:spPr>
-            <a:xfrm>
-              <a:off x="457189" y="3199904"/>
-              <a:ext cx="323544" cy="323552"/>
-            </a:xfrm>
-            <a:prstGeom prst="roundRect">
-              <a:avLst>
-                <a:gd name="adj" fmla="val 17148"/>
-              </a:avLst>
-            </a:prstGeom>
-            <a:solidFill>
-              <a:srgbClr val="B8D8BA"/>
-            </a:solidFill>
-            <a:ln w="6350">
-              <a:solidFill>
-                <a:srgbClr val="D3CEBA"/>
-              </a:solidFill>
-              <a:prstDash val="solid"/>
-            </a:ln>
-          </p:spPr>
-        </p:sp>
-        <p:sp>
-          <p:nvSpPr>
-            <p:cNvPr id="11" name="Text 9"/>
-            <p:cNvSpPr/>
-            <p:nvPr/>
-          </p:nvSpPr>
-          <p:spPr>
-            <a:xfrm>
-              <a:off x="563449" y="3269159"/>
-              <a:ext cx="720509" cy="184944"/>
-            </a:xfrm>
-            <a:prstGeom prst="rect">
-              <a:avLst/>
-            </a:prstGeom>
-            <a:noFill/>
-            <a:ln/>
-          </p:spPr>
-          <p:txBody>
-            <a:bodyPr wrap="none" lIns="0" tIns="0" rIns="0" bIns="0" rtlCol="0" anchor="t"/>
-            <a:lstStyle/>
-            <a:p>
-              <a:pPr marL="0" indent="0" algn="l">
-                <a:lnSpc>
-                  <a:spcPct val="83000"/>
-                </a:lnSpc>
-                <a:buNone/>
-              </a:pPr>
-              <a:r>
-                <a:rPr lang="en-US" sz="1450" dirty="0">
-                  <a:solidFill>
-                    <a:srgbClr val="000000"/>
-                  </a:solidFill>
-                  <a:latin typeface="IBM Plex Sans SemiBold" pitchFamily="34" charset="0"/>
-                  <a:ea typeface="IBM Plex Sans SemiBold" pitchFamily="34" charset="-122"/>
-                  <a:cs typeface="IBM Plex Sans SemiBold" pitchFamily="34" charset="-120"/>
-                </a:rPr>
-                <a:t>3</a:t>
-              </a:r>
-              <a:endParaRPr lang="en-US" sz="1450" dirty="0"/>
-            </a:p>
-          </p:txBody>
-        </p:sp>
-      </p:grpSp>
-      <p:sp>
-        <p:nvSpPr>
-          <p:cNvPr id="12" name="Text 10"/>
-          <p:cNvSpPr/>
-          <p:nvPr/>
-        </p:nvSpPr>
-        <p:spPr>
-          <a:xfrm>
-            <a:off x="965573" y="3255108"/>
-            <a:ext cx="5709400" cy="240308"/>
-          </a:xfrm>
-          <a:prstGeom prst="rect">
-            <a:avLst/>
-          </a:prstGeom>
-          <a:noFill/>
-          <a:ln/>
-        </p:spPr>
-        <p:txBody>
-          <a:bodyPr wrap="none" lIns="0" tIns="0" rIns="0" bIns="0" rtlCol="0" anchor="t"/>
-          <a:lstStyle/>
-          <a:p>
-            <a:pPr marL="0" indent="0" algn="l">
-              <a:lnSpc>
-                <a:spcPct val="108000"/>
-              </a:lnSpc>
-              <a:buNone/>
-            </a:pPr>
-            <a:r>
-              <a:rPr lang="en-US" sz="1450" dirty="0">
-                <a:solidFill>
-                  <a:srgbClr val="4D5B42"/>
-                </a:solidFill>
-                <a:latin typeface="IBM Plex Sans" pitchFamily="34" charset="0"/>
-                <a:ea typeface="IBM Plex Sans" pitchFamily="34" charset="-122"/>
-                <a:cs typeface="IBM Plex Sans" pitchFamily="34" charset="-120"/>
-              </a:rPr>
-              <a:t>Advance the pointer in the selected subarray.</a:t>
-            </a:r>
-            <a:endParaRPr lang="en-US" sz="1450" dirty="0"/>
-          </a:p>
-        </p:txBody>
-      </p:sp>
-      <p:grpSp>
-        <p:nvGrpSpPr>
           <p:cNvPr id="45" name="Group 44">
             <a:extLst>
               <a:ext uri="{FF2B5EF4-FFF2-40B4-BE49-F238E27FC236}">
@@ -7384,7 +6966,7 @@
         </p:nvGrpSpPr>
         <p:grpSpPr>
           <a:xfrm>
-            <a:off x="457189" y="4076601"/>
+            <a:off x="5900484" y="4171855"/>
             <a:ext cx="826769" cy="323552"/>
             <a:chOff x="457189" y="4076601"/>
             <a:chExt cx="826769" cy="323552"/>
@@ -7407,7 +6989,7 @@
               </a:avLst>
             </a:prstGeom>
             <a:solidFill>
-              <a:srgbClr val="B8D8BA"/>
+              <a:srgbClr val="A2CF51"/>
             </a:solidFill>
             <a:ln w="6350">
               <a:solidFill>
@@ -7462,187 +7044,13 @@
       </p:grpSp>
       <p:sp>
         <p:nvSpPr>
-          <p:cNvPr id="15" name="Text 13"/>
-          <p:cNvSpPr/>
-          <p:nvPr/>
-        </p:nvSpPr>
-        <p:spPr>
-          <a:xfrm>
-            <a:off x="965573" y="4131805"/>
-            <a:ext cx="5709400" cy="240308"/>
-          </a:xfrm>
-          <a:prstGeom prst="rect">
-            <a:avLst/>
-          </a:prstGeom>
-          <a:noFill/>
-          <a:ln/>
-        </p:spPr>
-        <p:txBody>
-          <a:bodyPr wrap="none" lIns="0" tIns="0" rIns="0" bIns="0" rtlCol="0" anchor="t"/>
-          <a:lstStyle/>
-          <a:p>
-            <a:pPr marL="0" indent="0" algn="l">
-              <a:lnSpc>
-                <a:spcPct val="108000"/>
-              </a:lnSpc>
-              <a:buNone/>
-            </a:pPr>
-            <a:r>
-              <a:rPr lang="en-US" sz="1450" dirty="0">
-                <a:solidFill>
-                  <a:srgbClr val="4D5B42"/>
-                </a:solidFill>
-                <a:latin typeface="IBM Plex Sans" pitchFamily="34" charset="0"/>
-                <a:ea typeface="IBM Plex Sans" pitchFamily="34" charset="-122"/>
-                <a:cs typeface="IBM Plex Sans" pitchFamily="34" charset="-120"/>
-              </a:rPr>
-              <a:t>Continue until one subarray is empty.</a:t>
-            </a:r>
-            <a:endParaRPr lang="en-US" sz="1450" dirty="0"/>
-          </a:p>
-        </p:txBody>
-      </p:sp>
-      <p:grpSp>
-        <p:nvGrpSpPr>
-          <p:cNvPr id="46" name="Group 45">
-            <a:extLst>
-              <a:ext uri="{FF2B5EF4-FFF2-40B4-BE49-F238E27FC236}">
-                <a16:creationId xmlns:a16="http://schemas.microsoft.com/office/drawing/2014/main" id="{6605A3B3-7826-B4D5-ACC6-CFC04A279A9E}"/>
-              </a:ext>
-            </a:extLst>
-          </p:cNvPr>
-          <p:cNvGrpSpPr/>
-          <p:nvPr/>
-        </p:nvGrpSpPr>
-        <p:grpSpPr>
-          <a:xfrm>
-            <a:off x="457189" y="4953298"/>
-            <a:ext cx="826769" cy="323552"/>
-            <a:chOff x="457189" y="4953298"/>
-            <a:chExt cx="826769" cy="323552"/>
-          </a:xfrm>
-        </p:grpSpPr>
-        <p:sp>
-          <p:nvSpPr>
-            <p:cNvPr id="16" name="Shape 14"/>
-            <p:cNvSpPr/>
-            <p:nvPr/>
-          </p:nvSpPr>
-          <p:spPr>
-            <a:xfrm>
-              <a:off x="457189" y="4953298"/>
-              <a:ext cx="323544" cy="323552"/>
-            </a:xfrm>
-            <a:prstGeom prst="roundRect">
-              <a:avLst>
-                <a:gd name="adj" fmla="val 17148"/>
-              </a:avLst>
-            </a:prstGeom>
-            <a:solidFill>
-              <a:srgbClr val="B8D8BA"/>
-            </a:solidFill>
-            <a:ln w="6350">
-              <a:solidFill>
-                <a:srgbClr val="D3CEBA"/>
-              </a:solidFill>
-              <a:prstDash val="solid"/>
-            </a:ln>
-          </p:spPr>
-        </p:sp>
-        <p:sp>
-          <p:nvSpPr>
-            <p:cNvPr id="17" name="Text 15"/>
-            <p:cNvSpPr/>
-            <p:nvPr/>
-          </p:nvSpPr>
-          <p:spPr>
-            <a:xfrm>
-              <a:off x="563449" y="5022552"/>
-              <a:ext cx="720509" cy="184944"/>
-            </a:xfrm>
-            <a:prstGeom prst="rect">
-              <a:avLst/>
-            </a:prstGeom>
-            <a:noFill/>
-            <a:ln/>
-          </p:spPr>
-          <p:txBody>
-            <a:bodyPr wrap="none" lIns="0" tIns="0" rIns="0" bIns="0" rtlCol="0" anchor="t"/>
-            <a:lstStyle/>
-            <a:p>
-              <a:pPr marL="0" indent="0" algn="l">
-                <a:lnSpc>
-                  <a:spcPct val="83000"/>
-                </a:lnSpc>
-                <a:buNone/>
-              </a:pPr>
-              <a:r>
-                <a:rPr lang="en-US" sz="1450" dirty="0">
-                  <a:solidFill>
-                    <a:srgbClr val="000000"/>
-                  </a:solidFill>
-                  <a:latin typeface="IBM Plex Sans SemiBold" pitchFamily="34" charset="0"/>
-                  <a:ea typeface="IBM Plex Sans SemiBold" pitchFamily="34" charset="-122"/>
-                  <a:cs typeface="IBM Plex Sans SemiBold" pitchFamily="34" charset="-120"/>
-                </a:rPr>
-                <a:t>5</a:t>
-              </a:r>
-              <a:endParaRPr lang="en-US" sz="1450" dirty="0"/>
-            </a:p>
-          </p:txBody>
-        </p:sp>
-      </p:grpSp>
-      <p:sp>
-        <p:nvSpPr>
-          <p:cNvPr id="18" name="Text 16"/>
-          <p:cNvSpPr/>
-          <p:nvPr/>
-        </p:nvSpPr>
-        <p:spPr>
-          <a:xfrm>
-            <a:off x="965573" y="5008502"/>
-            <a:ext cx="5709400" cy="240308"/>
-          </a:xfrm>
-          <a:prstGeom prst="rect">
-            <a:avLst/>
-          </a:prstGeom>
-          <a:noFill/>
-          <a:ln/>
-        </p:spPr>
-        <p:txBody>
-          <a:bodyPr wrap="none" lIns="0" tIns="0" rIns="0" bIns="0" rtlCol="0" anchor="t"/>
-          <a:lstStyle/>
-          <a:p>
-            <a:pPr marL="0" indent="0" algn="l">
-              <a:lnSpc>
-                <a:spcPct val="108000"/>
-              </a:lnSpc>
-              <a:buNone/>
-            </a:pPr>
-            <a:r>
-              <a:rPr lang="en-US" sz="1450" dirty="0">
-                <a:solidFill>
-                  <a:srgbClr val="4D5B42"/>
-                </a:solidFill>
-                <a:latin typeface="IBM Plex Sans" pitchFamily="34" charset="0"/>
-                <a:ea typeface="IBM Plex Sans" pitchFamily="34" charset="-122"/>
-                <a:cs typeface="IBM Plex Sans" pitchFamily="34" charset="-120"/>
-              </a:rPr>
-              <a:t>Append the remaining elements.</a:t>
-            </a:r>
-            <a:endParaRPr lang="en-US" sz="1450" dirty="0"/>
-          </a:p>
-        </p:txBody>
-      </p:sp>
-      <p:sp>
-        <p:nvSpPr>
           <p:cNvPr id="19" name="Text 17"/>
           <p:cNvSpPr/>
           <p:nvPr/>
         </p:nvSpPr>
         <p:spPr>
           <a:xfrm>
-            <a:off x="6979666" y="975869"/>
+            <a:off x="700895" y="1303271"/>
             <a:ext cx="4754840" cy="176709"/>
           </a:xfrm>
           <a:prstGeom prst="rect">
@@ -7673,32 +7081,12 @@
           </a:p>
         </p:txBody>
       </p:sp>
-      <p:sp>
-        <p:nvSpPr>
-          <p:cNvPr id="26" name="Shape 24"/>
-          <p:cNvSpPr/>
-          <p:nvPr/>
-        </p:nvSpPr>
-        <p:spPr>
-          <a:xfrm>
-            <a:off x="6979666" y="3838904"/>
-            <a:ext cx="4754840" cy="697508"/>
-          </a:xfrm>
-          <a:prstGeom prst="rect">
-            <a:avLst/>
-          </a:prstGeom>
-          <a:solidFill>
-            <a:srgbClr val="F6D96B"/>
-          </a:solidFill>
-          <a:ln/>
-        </p:spPr>
-      </p:sp>
       <p:grpSp>
         <p:nvGrpSpPr>
-          <p:cNvPr id="44" name="Group 43">
+          <p:cNvPr id="49" name="Group 48">
             <a:extLst>
               <a:ext uri="{FF2B5EF4-FFF2-40B4-BE49-F238E27FC236}">
-                <a16:creationId xmlns:a16="http://schemas.microsoft.com/office/drawing/2014/main" id="{2EC25F7A-FBB9-CAE2-C31A-4EC8ED0ACE47}"/>
+                <a16:creationId xmlns:a16="http://schemas.microsoft.com/office/drawing/2014/main" id="{4A34D69C-7DE0-7332-00C9-4BCFD794B87E}"/>
               </a:ext>
             </a:extLst>
           </p:cNvPr>
@@ -7707,12 +7095,32 @@
         </p:nvGrpSpPr>
         <p:grpSpPr>
           <a:xfrm>
-            <a:off x="6979361" y="1268047"/>
-            <a:ext cx="4777870" cy="4107852"/>
-            <a:chOff x="6956636" y="1631255"/>
-            <a:chExt cx="4777870" cy="4107852"/>
+            <a:off x="614156" y="1552485"/>
+            <a:ext cx="4904677" cy="3570855"/>
+            <a:chOff x="6979361" y="1361544"/>
+            <a:chExt cx="4777870" cy="4014355"/>
           </a:xfrm>
         </p:grpSpPr>
+        <p:sp>
+          <p:nvSpPr>
+            <p:cNvPr id="26" name="Shape 24"/>
+            <p:cNvSpPr/>
+            <p:nvPr/>
+          </p:nvSpPr>
+          <p:spPr>
+            <a:xfrm>
+              <a:off x="6979666" y="3838904"/>
+              <a:ext cx="4754840" cy="697508"/>
+            </a:xfrm>
+            <a:prstGeom prst="rect">
+              <a:avLst/>
+            </a:prstGeom>
+            <a:solidFill>
+              <a:srgbClr val="B8D8BA"/>
+            </a:solidFill>
+            <a:ln/>
+          </p:spPr>
+        </p:sp>
         <p:sp>
           <p:nvSpPr>
             <p:cNvPr id="20" name="Shape 18"/>
@@ -7721,8 +7129,8 @@
           </p:nvSpPr>
           <p:spPr>
             <a:xfrm>
-              <a:off x="6979666" y="1631255"/>
-              <a:ext cx="4754840" cy="697508"/>
+              <a:off x="7002391" y="1361544"/>
+              <a:ext cx="4754840" cy="604009"/>
             </a:xfrm>
             <a:prstGeom prst="rect">
               <a:avLst/>
@@ -7741,7 +7149,7 @@
           </p:nvSpPr>
           <p:spPr>
             <a:xfrm>
-              <a:off x="7208260" y="1871205"/>
+              <a:off x="7230985" y="1507997"/>
               <a:ext cx="4526246" cy="240308"/>
             </a:xfrm>
             <a:prstGeom prst="rect">
@@ -7783,14 +7191,14 @@
           </p:nvSpPr>
           <p:spPr>
             <a:xfrm>
-              <a:off x="6979666" y="2481163"/>
+              <a:off x="7002391" y="2117955"/>
               <a:ext cx="4754840" cy="697508"/>
             </a:xfrm>
             <a:prstGeom prst="rect">
               <a:avLst/>
             </a:prstGeom>
             <a:solidFill>
-              <a:srgbClr val="F6D96B"/>
+              <a:srgbClr val="B8D8BA"/>
             </a:solidFill>
             <a:ln/>
           </p:spPr>
@@ -7803,7 +7211,7 @@
           </p:nvSpPr>
           <p:spPr>
             <a:xfrm>
-              <a:off x="7208260" y="2721113"/>
+              <a:off x="7230985" y="2357905"/>
               <a:ext cx="4526246" cy="240308"/>
             </a:xfrm>
             <a:prstGeom prst="rect">
@@ -7845,14 +7253,14 @@
           </p:nvSpPr>
           <p:spPr>
             <a:xfrm>
-              <a:off x="6979666" y="3331071"/>
+              <a:off x="7002391" y="2967863"/>
               <a:ext cx="4754840" cy="697508"/>
             </a:xfrm>
             <a:prstGeom prst="rect">
               <a:avLst/>
             </a:prstGeom>
             <a:solidFill>
-              <a:srgbClr val="E94B55"/>
+              <a:srgbClr val="B8D8BA"/>
             </a:solidFill>
             <a:ln/>
           </p:spPr>
@@ -7865,7 +7273,7 @@
           </p:nvSpPr>
           <p:spPr>
             <a:xfrm>
-              <a:off x="7208260" y="3571021"/>
+              <a:off x="7230985" y="3207813"/>
               <a:ext cx="4526246" cy="240308"/>
             </a:xfrm>
             <a:prstGeom prst="rect">
@@ -7885,17 +7293,16 @@
                 <a:buNone/>
               </a:pPr>
               <a:r>
-                <a:rPr lang="en-US" sz="1450" b="1" dirty="0">
-                  <a:solidFill>
-                    <a:srgbClr val="FFFFFF"/>
-                  </a:solidFill>
-                  <a:latin typeface="IBM Plex Sans Bold" pitchFamily="34" charset="0"/>
+                <a:rPr lang="en-US" sz="1450" dirty="0">
+                  <a:latin typeface="IBM Plex Sans" panose="020B0503050203000203" pitchFamily="34" charset="0"/>
                   <a:ea typeface="IBM Plex Sans Bold" pitchFamily="34" charset="-122"/>
                   <a:cs typeface="IBM Plex Sans Bold" pitchFamily="34" charset="-120"/>
                 </a:rPr>
                 <a:t>Compare 12 vs 27 → copy 12</a:t>
               </a:r>
-              <a:endParaRPr lang="en-US" sz="1450" dirty="0"/>
+              <a:endParaRPr lang="en-US" sz="1450" dirty="0">
+                <a:latin typeface="IBM Plex Sans" panose="020B0503050203000203" pitchFamily="34" charset="0"/>
+              </a:endParaRPr>
             </a:p>
           </p:txBody>
         </p:sp>
@@ -7907,7 +7314,7 @@
           </p:nvSpPr>
           <p:spPr>
             <a:xfrm>
-              <a:off x="7208260" y="4420929"/>
+              <a:off x="7230985" y="4057721"/>
               <a:ext cx="4526246" cy="240308"/>
             </a:xfrm>
             <a:prstGeom prst="rect">
@@ -7927,17 +7334,19 @@
                 <a:buNone/>
               </a:pPr>
               <a:r>
-                <a:rPr lang="en-US" sz="1450" b="1" dirty="0">
+                <a:rPr lang="en-US" sz="1450" dirty="0">
                   <a:solidFill>
                     <a:srgbClr val="000000"/>
                   </a:solidFill>
-                  <a:latin typeface="IBM Plex Sans Bold" pitchFamily="34" charset="0"/>
+                  <a:latin typeface="IBM Plex Sans" panose="020B0503050203000203" pitchFamily="34" charset="0"/>
                   <a:ea typeface="IBM Plex Sans Bold" pitchFamily="34" charset="-122"/>
                   <a:cs typeface="IBM Plex Sans Bold" pitchFamily="34" charset="-120"/>
                 </a:rPr>
                 <a:t>Output: [12]</a:t>
               </a:r>
-              <a:endParaRPr lang="en-US" sz="1450" dirty="0"/>
+              <a:endParaRPr lang="en-US" sz="1450" dirty="0">
+                <a:latin typeface="IBM Plex Sans" panose="020B0503050203000203" pitchFamily="34" charset="0"/>
+              </a:endParaRPr>
             </a:p>
           </p:txBody>
         </p:sp>
@@ -7949,7 +7358,7 @@
           </p:nvSpPr>
           <p:spPr>
             <a:xfrm>
-              <a:off x="6956636" y="5041599"/>
+              <a:off x="6979361" y="4678391"/>
               <a:ext cx="4754840" cy="697508"/>
             </a:xfrm>
             <a:prstGeom prst="rect">
@@ -7969,7 +7378,7 @@
           </p:nvSpPr>
           <p:spPr>
             <a:xfrm>
-              <a:off x="7208260" y="5270836"/>
+              <a:off x="7230985" y="4907628"/>
               <a:ext cx="4526246" cy="240308"/>
             </a:xfrm>
             <a:prstGeom prst="rect">
@@ -8004,325 +7413,1012 @@
           </p:txBody>
         </p:sp>
       </p:grpSp>
-      <p:sp>
-        <p:nvSpPr>
-          <p:cNvPr id="30" name="Shape 28"/>
-          <p:cNvSpPr/>
-          <p:nvPr/>
-        </p:nvSpPr>
-        <p:spPr>
-          <a:xfrm>
-            <a:off x="457494" y="5730218"/>
-            <a:ext cx="3555911" cy="881392"/>
-          </a:xfrm>
-          <a:prstGeom prst="rect">
-            <a:avLst/>
-          </a:prstGeom>
-          <a:solidFill>
-            <a:srgbClr val="B8D8BA"/>
-          </a:solidFill>
-          <a:ln/>
-        </p:spPr>
-        <p:txBody>
-          <a:bodyPr/>
-          <a:lstStyle/>
-          <a:p>
-            <a:endParaRPr lang="en-IN" dirty="0"/>
-          </a:p>
-        </p:txBody>
-      </p:sp>
-      <p:sp>
-        <p:nvSpPr>
-          <p:cNvPr id="31" name="Text 29"/>
-          <p:cNvSpPr/>
-          <p:nvPr/>
-        </p:nvSpPr>
-        <p:spPr>
-          <a:xfrm>
-            <a:off x="686088" y="6057040"/>
-            <a:ext cx="3327317" cy="254496"/>
-          </a:xfrm>
-          <a:prstGeom prst="rect">
-            <a:avLst/>
-          </a:prstGeom>
-          <a:noFill/>
-          <a:ln/>
-        </p:spPr>
-        <p:txBody>
-          <a:bodyPr wrap="none" lIns="0" tIns="0" rIns="0" bIns="0" rtlCol="0" anchor="t"/>
-          <a:lstStyle/>
-          <a:p>
-            <a:pPr marL="0" indent="0" algn="l">
-              <a:lnSpc>
-                <a:spcPct val="108000"/>
-              </a:lnSpc>
-              <a:buNone/>
-            </a:pPr>
-            <a:r>
-              <a:rPr lang="en-US" sz="1550" dirty="0">
+      <p:grpSp>
+        <p:nvGrpSpPr>
+          <p:cNvPr id="50" name="Group 49">
+            <a:extLst>
+              <a:ext uri="{FF2B5EF4-FFF2-40B4-BE49-F238E27FC236}">
+                <a16:creationId xmlns:a16="http://schemas.microsoft.com/office/drawing/2014/main" id="{C0AB0E9D-5B9C-DD5F-F6C6-0D8F9E229012}"/>
+              </a:ext>
+            </a:extLst>
+          </p:cNvPr>
+          <p:cNvGrpSpPr/>
+          <p:nvPr/>
+        </p:nvGrpSpPr>
+        <p:grpSpPr>
+          <a:xfrm>
+            <a:off x="609758" y="5231953"/>
+            <a:ext cx="4880723" cy="563117"/>
+            <a:chOff x="457494" y="5730218"/>
+            <a:chExt cx="3555911" cy="881392"/>
+          </a:xfrm>
+        </p:grpSpPr>
+        <p:sp>
+          <p:nvSpPr>
+            <p:cNvPr id="30" name="Shape 28"/>
+            <p:cNvSpPr/>
+            <p:nvPr/>
+          </p:nvSpPr>
+          <p:spPr>
+            <a:xfrm>
+              <a:off x="457494" y="5730218"/>
+              <a:ext cx="3555911" cy="881392"/>
+            </a:xfrm>
+            <a:prstGeom prst="rect">
+              <a:avLst/>
+            </a:prstGeom>
+            <a:solidFill>
+              <a:srgbClr val="B8D8BA"/>
+            </a:solidFill>
+            <a:ln/>
+          </p:spPr>
+          <p:txBody>
+            <a:bodyPr/>
+            <a:lstStyle/>
+            <a:p>
+              <a:endParaRPr lang="en-IN" dirty="0"/>
+            </a:p>
+          </p:txBody>
+        </p:sp>
+        <p:sp>
+          <p:nvSpPr>
+            <p:cNvPr id="31" name="Text 29"/>
+            <p:cNvSpPr/>
+            <p:nvPr/>
+          </p:nvSpPr>
+          <p:spPr>
+            <a:xfrm>
+              <a:off x="686088" y="5980932"/>
+              <a:ext cx="3327317" cy="254496"/>
+            </a:xfrm>
+            <a:prstGeom prst="rect">
+              <a:avLst/>
+            </a:prstGeom>
+            <a:noFill/>
+            <a:ln/>
+          </p:spPr>
+          <p:txBody>
+            <a:bodyPr wrap="none" lIns="0" tIns="0" rIns="0" bIns="0" rtlCol="0" anchor="t"/>
+            <a:lstStyle/>
+            <a:p>
+              <a:pPr marL="0" indent="0" algn="l">
+                <a:lnSpc>
+                  <a:spcPct val="108000"/>
+                </a:lnSpc>
+                <a:buNone/>
+              </a:pPr>
+              <a:r>
+                <a:rPr lang="en-US" sz="1550" dirty="0">
+                  <a:solidFill>
+                    <a:srgbClr val="000000"/>
+                  </a:solidFill>
+                  <a:latin typeface="IBM Plex Sans" pitchFamily="34" charset="0"/>
+                  <a:ea typeface="IBM Plex Sans" pitchFamily="34" charset="-122"/>
+                  <a:cs typeface="IBM Plex Sans" pitchFamily="34" charset="-120"/>
+                </a:rPr>
+                <a:t>[38] + [12] → </a:t>
+              </a:r>
+              <a:r>
+                <a:rPr lang="en-US" sz="1550" b="1" dirty="0">
+                  <a:solidFill>
+                    <a:srgbClr val="000000"/>
+                  </a:solidFill>
+                  <a:latin typeface="IBM Plex Sans Bold" pitchFamily="34" charset="0"/>
+                  <a:ea typeface="IBM Plex Sans Bold" pitchFamily="34" charset="-122"/>
+                  <a:cs typeface="IBM Plex Sans Bold" pitchFamily="34" charset="-120"/>
+                </a:rPr>
+                <a:t>[12, 38]</a:t>
+              </a:r>
+              <a:endParaRPr lang="en-US" sz="1550" dirty="0"/>
+            </a:p>
+          </p:txBody>
+        </p:sp>
+      </p:grpSp>
+      <p:grpSp>
+        <p:nvGrpSpPr>
+          <p:cNvPr id="51" name="Group 50">
+            <a:extLst>
+              <a:ext uri="{FF2B5EF4-FFF2-40B4-BE49-F238E27FC236}">
+                <a16:creationId xmlns:a16="http://schemas.microsoft.com/office/drawing/2014/main" id="{8292AEFC-192B-DCA2-788E-3F77F91A9799}"/>
+              </a:ext>
+            </a:extLst>
+          </p:cNvPr>
+          <p:cNvGrpSpPr/>
+          <p:nvPr/>
+        </p:nvGrpSpPr>
+        <p:grpSpPr>
+          <a:xfrm>
+            <a:off x="614156" y="5953423"/>
+            <a:ext cx="4876325" cy="563117"/>
+            <a:chOff x="4317892" y="5730218"/>
+            <a:chExt cx="3555911" cy="881392"/>
+          </a:xfrm>
+        </p:grpSpPr>
+        <p:sp>
+          <p:nvSpPr>
+            <p:cNvPr id="32" name="Shape 30"/>
+            <p:cNvSpPr/>
+            <p:nvPr/>
+          </p:nvSpPr>
+          <p:spPr>
+            <a:xfrm>
+              <a:off x="4317892" y="5730218"/>
+              <a:ext cx="3555911" cy="881392"/>
+            </a:xfrm>
+            <a:prstGeom prst="rect">
+              <a:avLst/>
+            </a:prstGeom>
+            <a:solidFill>
+              <a:srgbClr val="B8D8BA"/>
+            </a:solidFill>
+            <a:ln/>
+          </p:spPr>
+        </p:sp>
+        <p:sp>
+          <p:nvSpPr>
+            <p:cNvPr id="33" name="Text 31"/>
+            <p:cNvSpPr/>
+            <p:nvPr/>
+          </p:nvSpPr>
+          <p:spPr>
+            <a:xfrm>
+              <a:off x="4546486" y="5998577"/>
+              <a:ext cx="3327317" cy="254496"/>
+            </a:xfrm>
+            <a:prstGeom prst="rect">
+              <a:avLst/>
+            </a:prstGeom>
+            <a:noFill/>
+            <a:ln/>
+          </p:spPr>
+          <p:txBody>
+            <a:bodyPr wrap="none" lIns="0" tIns="0" rIns="0" bIns="0" rtlCol="0" anchor="t"/>
+            <a:lstStyle/>
+            <a:p>
+              <a:pPr marL="0" indent="0" algn="l">
+                <a:lnSpc>
+                  <a:spcPct val="108000"/>
+                </a:lnSpc>
+                <a:buNone/>
+              </a:pPr>
+              <a:r>
+                <a:rPr lang="en-US" sz="1550" dirty="0">
+                  <a:solidFill>
+                    <a:srgbClr val="000000"/>
+                  </a:solidFill>
+                  <a:latin typeface="IBM Plex Sans" pitchFamily="34" charset="0"/>
+                  <a:ea typeface="IBM Plex Sans" pitchFamily="34" charset="-122"/>
+                  <a:cs typeface="IBM Plex Sans" pitchFamily="34" charset="-120"/>
+                </a:rPr>
+                <a:t>[27] + [43] → </a:t>
+              </a:r>
+              <a:r>
+                <a:rPr lang="en-US" sz="1550" b="1" dirty="0">
+                  <a:solidFill>
+                    <a:srgbClr val="000000"/>
+                  </a:solidFill>
+                  <a:latin typeface="IBM Plex Sans Bold" pitchFamily="34" charset="0"/>
+                  <a:ea typeface="IBM Plex Sans Bold" pitchFamily="34" charset="-122"/>
+                  <a:cs typeface="IBM Plex Sans Bold" pitchFamily="34" charset="-120"/>
+                </a:rPr>
+                <a:t>[27, 43]</a:t>
+              </a:r>
+              <a:endParaRPr lang="en-US" sz="1550" dirty="0"/>
+            </a:p>
+          </p:txBody>
+        </p:sp>
+      </p:grpSp>
+      <p:grpSp>
+        <p:nvGrpSpPr>
+          <p:cNvPr id="52" name="Group 51">
+            <a:extLst>
+              <a:ext uri="{FF2B5EF4-FFF2-40B4-BE49-F238E27FC236}">
+                <a16:creationId xmlns:a16="http://schemas.microsoft.com/office/drawing/2014/main" id="{80547214-5D0D-1A0A-01D7-89F06386964D}"/>
+              </a:ext>
+            </a:extLst>
+          </p:cNvPr>
+          <p:cNvGrpSpPr/>
+          <p:nvPr/>
+        </p:nvGrpSpPr>
+        <p:grpSpPr>
+          <a:xfrm>
+            <a:off x="5928360" y="5877278"/>
+            <a:ext cx="5034562" cy="563117"/>
+            <a:chOff x="8178290" y="5717519"/>
+            <a:chExt cx="3556217" cy="894092"/>
+          </a:xfrm>
+        </p:grpSpPr>
+        <p:sp>
+          <p:nvSpPr>
+            <p:cNvPr id="34" name="Shape 32"/>
+            <p:cNvSpPr/>
+            <p:nvPr/>
+          </p:nvSpPr>
+          <p:spPr>
+            <a:xfrm>
+              <a:off x="8178290" y="5717519"/>
+              <a:ext cx="3555911" cy="894092"/>
+            </a:xfrm>
+            <a:prstGeom prst="rect">
+              <a:avLst/>
+            </a:prstGeom>
+            <a:solidFill>
+              <a:srgbClr val="A2CF51"/>
+            </a:solidFill>
+            <a:ln/>
+          </p:spPr>
+          <p:txBody>
+            <a:bodyPr/>
+            <a:lstStyle/>
+            <a:p>
+              <a:endParaRPr lang="en-IN" dirty="0"/>
+            </a:p>
+          </p:txBody>
+        </p:sp>
+        <p:sp>
+          <p:nvSpPr>
+            <p:cNvPr id="35" name="Text 33"/>
+            <p:cNvSpPr/>
+            <p:nvPr/>
+          </p:nvSpPr>
+          <p:spPr>
+            <a:xfrm>
+              <a:off x="8301150" y="6055902"/>
+              <a:ext cx="3433357" cy="508992"/>
+            </a:xfrm>
+            <a:prstGeom prst="rect">
+              <a:avLst/>
+            </a:prstGeom>
+            <a:noFill/>
+            <a:ln/>
+          </p:spPr>
+          <p:txBody>
+            <a:bodyPr wrap="square" lIns="0" tIns="0" rIns="0" bIns="0" rtlCol="0" anchor="t">
+              <a:normAutofit/>
+            </a:bodyPr>
+            <a:lstStyle/>
+            <a:p>
+              <a:pPr marL="0" indent="0" algn="l">
+                <a:lnSpc>
+                  <a:spcPct val="108000"/>
+                </a:lnSpc>
+                <a:buNone/>
+              </a:pPr>
+              <a:r>
+                <a:rPr lang="en-US" sz="1550" dirty="0">
+                  <a:solidFill>
+                    <a:srgbClr val="000000"/>
+                  </a:solidFill>
+                  <a:latin typeface="IBM Plex Sans" pitchFamily="34" charset="0"/>
+                  <a:ea typeface="IBM Plex Sans" pitchFamily="34" charset="-122"/>
+                  <a:cs typeface="IBM Plex Sans" pitchFamily="34" charset="-120"/>
+                </a:rPr>
+                <a:t>[12, 38] + [27, 43] → </a:t>
+              </a:r>
+              <a:r>
+                <a:rPr lang="en-US" sz="1550" b="1" dirty="0">
+                  <a:solidFill>
+                    <a:srgbClr val="000000"/>
+                  </a:solidFill>
+                  <a:latin typeface="IBM Plex Sans Bold" pitchFamily="34" charset="0"/>
+                  <a:ea typeface="IBM Plex Sans Bold" pitchFamily="34" charset="-122"/>
+                  <a:cs typeface="IBM Plex Sans Bold" pitchFamily="34" charset="-120"/>
+                </a:rPr>
+                <a:t>[12, 27, 38, 43]</a:t>
+              </a:r>
+              <a:endParaRPr lang="en-US" sz="1550" dirty="0"/>
+            </a:p>
+          </p:txBody>
+        </p:sp>
+      </p:grpSp>
+      <p:grpSp>
+        <p:nvGrpSpPr>
+          <p:cNvPr id="47" name="Group 46">
+            <a:extLst>
+              <a:ext uri="{FF2B5EF4-FFF2-40B4-BE49-F238E27FC236}">
+                <a16:creationId xmlns:a16="http://schemas.microsoft.com/office/drawing/2014/main" id="{1A9CAF7E-8577-EF2F-FFEC-C7D4E1F2CE11}"/>
+              </a:ext>
+            </a:extLst>
+          </p:cNvPr>
+          <p:cNvGrpSpPr/>
+          <p:nvPr/>
+        </p:nvGrpSpPr>
+        <p:grpSpPr>
+          <a:xfrm>
+            <a:off x="5879116" y="1493469"/>
+            <a:ext cx="6217785" cy="3830141"/>
+            <a:chOff x="457188" y="1446709"/>
+            <a:chExt cx="6217785" cy="3830141"/>
+          </a:xfrm>
+        </p:grpSpPr>
+        <p:grpSp>
+          <p:nvGrpSpPr>
+            <p:cNvPr id="40" name="Group 39">
+              <a:extLst>
+                <a:ext uri="{FF2B5EF4-FFF2-40B4-BE49-F238E27FC236}">
+                  <a16:creationId xmlns:a16="http://schemas.microsoft.com/office/drawing/2014/main" id="{5DA252DE-FEF7-B003-D93E-191EE65E33C5}"/>
+                </a:ext>
+              </a:extLst>
+            </p:cNvPr>
+            <p:cNvGrpSpPr/>
+            <p:nvPr/>
+          </p:nvGrpSpPr>
+          <p:grpSpPr>
+            <a:xfrm>
+              <a:off x="457189" y="1446709"/>
+              <a:ext cx="826769" cy="323552"/>
+              <a:chOff x="457189" y="1446709"/>
+              <a:chExt cx="826769" cy="323552"/>
+            </a:xfrm>
+          </p:grpSpPr>
+          <p:sp>
+            <p:nvSpPr>
+              <p:cNvPr id="4" name="Shape 2"/>
+              <p:cNvSpPr/>
+              <p:nvPr/>
+            </p:nvSpPr>
+            <p:spPr>
+              <a:xfrm>
+                <a:off x="457189" y="1446709"/>
+                <a:ext cx="323544" cy="323552"/>
+              </a:xfrm>
+              <a:prstGeom prst="roundRect">
+                <a:avLst>
+                  <a:gd name="adj" fmla="val 17148"/>
+                </a:avLst>
+              </a:prstGeom>
+              <a:solidFill>
+                <a:srgbClr val="A2CF51"/>
+              </a:solidFill>
+              <a:ln w="6350">
                 <a:solidFill>
-                  <a:srgbClr val="000000"/>
+                  <a:srgbClr val="D3CEBA"/>
                 </a:solidFill>
-                <a:latin typeface="IBM Plex Sans" pitchFamily="34" charset="0"/>
-                <a:ea typeface="IBM Plex Sans" pitchFamily="34" charset="-122"/>
-                <a:cs typeface="IBM Plex Sans" pitchFamily="34" charset="-120"/>
-              </a:rPr>
-              <a:t>[38] + [12] → </a:t>
-            </a:r>
-            <a:r>
-              <a:rPr lang="en-US" sz="1550" b="1" dirty="0">
+                <a:prstDash val="solid"/>
+              </a:ln>
+            </p:spPr>
+          </p:sp>
+          <p:sp>
+            <p:nvSpPr>
+              <p:cNvPr id="5" name="Text 3"/>
+              <p:cNvSpPr/>
+              <p:nvPr/>
+            </p:nvSpPr>
+            <p:spPr>
+              <a:xfrm>
+                <a:off x="563449" y="1515963"/>
+                <a:ext cx="720509" cy="184944"/>
+              </a:xfrm>
+              <a:prstGeom prst="rect">
+                <a:avLst/>
+              </a:prstGeom>
+              <a:noFill/>
+              <a:ln/>
+            </p:spPr>
+            <p:txBody>
+              <a:bodyPr wrap="none" lIns="0" tIns="0" rIns="0" bIns="0" rtlCol="0" anchor="t"/>
+              <a:lstStyle/>
+              <a:p>
+                <a:pPr marL="0" indent="0" algn="l">
+                  <a:lnSpc>
+                    <a:spcPct val="83000"/>
+                  </a:lnSpc>
+                  <a:buNone/>
+                </a:pPr>
+                <a:r>
+                  <a:rPr lang="en-US" sz="1450" dirty="0">
+                    <a:solidFill>
+                      <a:srgbClr val="000000"/>
+                    </a:solidFill>
+                    <a:latin typeface="IBM Plex Sans SemiBold" pitchFamily="34" charset="0"/>
+                    <a:ea typeface="IBM Plex Sans SemiBold" pitchFamily="34" charset="-122"/>
+                    <a:cs typeface="IBM Plex Sans SemiBold" pitchFamily="34" charset="-120"/>
+                  </a:rPr>
+                  <a:t>1</a:t>
+                </a:r>
+                <a:endParaRPr lang="en-US" sz="1450" dirty="0"/>
+              </a:p>
+            </p:txBody>
+          </p:sp>
+        </p:grpSp>
+        <p:sp>
+          <p:nvSpPr>
+            <p:cNvPr id="6" name="Text 4"/>
+            <p:cNvSpPr/>
+            <p:nvPr/>
+          </p:nvSpPr>
+          <p:spPr>
+            <a:xfrm>
+              <a:off x="965573" y="1501913"/>
+              <a:ext cx="5709400" cy="240308"/>
+            </a:xfrm>
+            <a:prstGeom prst="rect">
+              <a:avLst/>
+            </a:prstGeom>
+            <a:noFill/>
+            <a:ln/>
+          </p:spPr>
+          <p:txBody>
+            <a:bodyPr wrap="none" lIns="0" tIns="0" rIns="0" bIns="0" rtlCol="0" anchor="t"/>
+            <a:lstStyle/>
+            <a:p>
+              <a:pPr marL="0" indent="0" algn="l">
+                <a:lnSpc>
+                  <a:spcPct val="108000"/>
+                </a:lnSpc>
+                <a:buNone/>
+              </a:pPr>
+              <a:r>
+                <a:rPr lang="en-US" sz="1450" b="1" dirty="0">
+                  <a:solidFill>
+                    <a:srgbClr val="4D5B42"/>
+                  </a:solidFill>
+                  <a:latin typeface="IBM Plex Sans Bold" pitchFamily="34" charset="0"/>
+                  <a:ea typeface="IBM Plex Sans Bold" pitchFamily="34" charset="-122"/>
+                  <a:cs typeface="IBM Plex Sans Bold" pitchFamily="34" charset="-120"/>
+                </a:rPr>
+                <a:t>Compare</a:t>
+              </a:r>
+              <a:r>
+                <a:rPr lang="en-US" sz="1450" dirty="0">
+                  <a:solidFill>
+                    <a:srgbClr val="4D5B42"/>
+                  </a:solidFill>
+                  <a:latin typeface="IBM Plex Sans" pitchFamily="34" charset="0"/>
+                  <a:ea typeface="IBM Plex Sans" pitchFamily="34" charset="-122"/>
+                  <a:cs typeface="IBM Plex Sans" pitchFamily="34" charset="-120"/>
+                </a:rPr>
+                <a:t> the first unprocessed elements of two sorted subarrays.</a:t>
+              </a:r>
+              <a:endParaRPr lang="en-US" sz="1450" dirty="0"/>
+            </a:p>
+          </p:txBody>
+        </p:sp>
+        <p:grpSp>
+          <p:nvGrpSpPr>
+            <p:cNvPr id="41" name="Group 40">
+              <a:extLst>
+                <a:ext uri="{FF2B5EF4-FFF2-40B4-BE49-F238E27FC236}">
+                  <a16:creationId xmlns:a16="http://schemas.microsoft.com/office/drawing/2014/main" id="{209FB303-5C55-010A-83CD-A6943384CD8D}"/>
+                </a:ext>
+              </a:extLst>
+            </p:cNvPr>
+            <p:cNvGrpSpPr/>
+            <p:nvPr/>
+          </p:nvGrpSpPr>
+          <p:grpSpPr>
+            <a:xfrm>
+              <a:off x="457189" y="2323306"/>
+              <a:ext cx="826769" cy="323552"/>
+              <a:chOff x="457189" y="2323306"/>
+              <a:chExt cx="826769" cy="323552"/>
+            </a:xfrm>
+          </p:grpSpPr>
+          <p:sp>
+            <p:nvSpPr>
+              <p:cNvPr id="7" name="Shape 5"/>
+              <p:cNvSpPr/>
+              <p:nvPr/>
+            </p:nvSpPr>
+            <p:spPr>
+              <a:xfrm>
+                <a:off x="457189" y="2323306"/>
+                <a:ext cx="323544" cy="323552"/>
+              </a:xfrm>
+              <a:prstGeom prst="roundRect">
+                <a:avLst>
+                  <a:gd name="adj" fmla="val 17148"/>
+                </a:avLst>
+              </a:prstGeom>
+              <a:solidFill>
+                <a:srgbClr val="A2CF51"/>
+              </a:solidFill>
+              <a:ln w="6350">
                 <a:solidFill>
-                  <a:srgbClr val="000000"/>
+                  <a:srgbClr val="D3CEBA"/>
                 </a:solidFill>
-                <a:latin typeface="IBM Plex Sans Bold" pitchFamily="34" charset="0"/>
-                <a:ea typeface="IBM Plex Sans Bold" pitchFamily="34" charset="-122"/>
-                <a:cs typeface="IBM Plex Sans Bold" pitchFamily="34" charset="-120"/>
-              </a:rPr>
-              <a:t>[12, 38]</a:t>
-            </a:r>
-            <a:endParaRPr lang="en-US" sz="1550" dirty="0"/>
-          </a:p>
-        </p:txBody>
-      </p:sp>
-      <p:sp>
-        <p:nvSpPr>
-          <p:cNvPr id="32" name="Shape 30"/>
-          <p:cNvSpPr/>
-          <p:nvPr/>
-        </p:nvSpPr>
-        <p:spPr>
-          <a:xfrm>
-            <a:off x="4317892" y="5730218"/>
-            <a:ext cx="3555911" cy="881392"/>
-          </a:xfrm>
-          <a:prstGeom prst="rect">
-            <a:avLst/>
-          </a:prstGeom>
-          <a:solidFill>
-            <a:srgbClr val="B8D8BA"/>
-          </a:solidFill>
-          <a:ln/>
-        </p:spPr>
-      </p:sp>
-      <p:sp>
-        <p:nvSpPr>
-          <p:cNvPr id="33" name="Text 31"/>
-          <p:cNvSpPr/>
-          <p:nvPr/>
-        </p:nvSpPr>
-        <p:spPr>
-          <a:xfrm>
-            <a:off x="4546486" y="6087309"/>
-            <a:ext cx="3327317" cy="254496"/>
-          </a:xfrm>
-          <a:prstGeom prst="rect">
-            <a:avLst/>
-          </a:prstGeom>
-          <a:noFill/>
-          <a:ln/>
-        </p:spPr>
-        <p:txBody>
-          <a:bodyPr wrap="none" lIns="0" tIns="0" rIns="0" bIns="0" rtlCol="0" anchor="t"/>
-          <a:lstStyle/>
-          <a:p>
-            <a:pPr marL="0" indent="0" algn="l">
-              <a:lnSpc>
-                <a:spcPct val="108000"/>
-              </a:lnSpc>
-              <a:buNone/>
-            </a:pPr>
-            <a:r>
-              <a:rPr lang="en-US" sz="1550" dirty="0">
+                <a:prstDash val="solid"/>
+              </a:ln>
+            </p:spPr>
+          </p:sp>
+          <p:sp>
+            <p:nvSpPr>
+              <p:cNvPr id="8" name="Text 6"/>
+              <p:cNvSpPr/>
+              <p:nvPr/>
+            </p:nvSpPr>
+            <p:spPr>
+              <a:xfrm>
+                <a:off x="563449" y="2392561"/>
+                <a:ext cx="720509" cy="184944"/>
+              </a:xfrm>
+              <a:prstGeom prst="rect">
+                <a:avLst/>
+              </a:prstGeom>
+              <a:noFill/>
+              <a:ln/>
+            </p:spPr>
+            <p:txBody>
+              <a:bodyPr wrap="none" lIns="0" tIns="0" rIns="0" bIns="0" rtlCol="0" anchor="t"/>
+              <a:lstStyle/>
+              <a:p>
+                <a:pPr marL="0" indent="0" algn="l">
+                  <a:lnSpc>
+                    <a:spcPct val="83000"/>
+                  </a:lnSpc>
+                  <a:buNone/>
+                </a:pPr>
+                <a:r>
+                  <a:rPr lang="en-US" sz="1450" dirty="0">
+                    <a:solidFill>
+                      <a:srgbClr val="000000"/>
+                    </a:solidFill>
+                    <a:latin typeface="IBM Plex Sans SemiBold" pitchFamily="34" charset="0"/>
+                    <a:ea typeface="IBM Plex Sans SemiBold" pitchFamily="34" charset="-122"/>
+                    <a:cs typeface="IBM Plex Sans SemiBold" pitchFamily="34" charset="-120"/>
+                  </a:rPr>
+                  <a:t>2</a:t>
+                </a:r>
+                <a:endParaRPr lang="en-US" sz="1450" dirty="0"/>
+              </a:p>
+            </p:txBody>
+          </p:sp>
+        </p:grpSp>
+        <p:sp>
+          <p:nvSpPr>
+            <p:cNvPr id="9" name="Text 7"/>
+            <p:cNvSpPr/>
+            <p:nvPr/>
+          </p:nvSpPr>
+          <p:spPr>
+            <a:xfrm>
+              <a:off x="965573" y="2378511"/>
+              <a:ext cx="5709400" cy="240308"/>
+            </a:xfrm>
+            <a:prstGeom prst="rect">
+              <a:avLst/>
+            </a:prstGeom>
+            <a:noFill/>
+            <a:ln/>
+          </p:spPr>
+          <p:txBody>
+            <a:bodyPr wrap="none" lIns="0" tIns="0" rIns="0" bIns="0" rtlCol="0" anchor="t"/>
+            <a:lstStyle/>
+            <a:p>
+              <a:pPr marL="0" indent="0" algn="l">
+                <a:lnSpc>
+                  <a:spcPct val="108000"/>
+                </a:lnSpc>
+                <a:buNone/>
+              </a:pPr>
+              <a:r>
+                <a:rPr lang="en-US" sz="1450" dirty="0">
+                  <a:solidFill>
+                    <a:srgbClr val="4D5B42"/>
+                  </a:solidFill>
+                  <a:latin typeface="IBM Plex Sans" panose="020B0503050203000203" pitchFamily="34" charset="0"/>
+                  <a:ea typeface="IBM Plex Sans Bold" pitchFamily="34" charset="-122"/>
+                  <a:cs typeface="IBM Plex Sans Bold" pitchFamily="34" charset="-120"/>
+                </a:rPr>
+                <a:t>Copy</a:t>
+              </a:r>
+              <a:r>
+                <a:rPr lang="en-US" sz="1450" dirty="0">
+                  <a:solidFill>
+                    <a:srgbClr val="4D5B42"/>
+                  </a:solidFill>
+                  <a:latin typeface="IBM Plex Sans" pitchFamily="34" charset="0"/>
+                  <a:ea typeface="IBM Plex Sans" pitchFamily="34" charset="-122"/>
+                  <a:cs typeface="IBM Plex Sans" pitchFamily="34" charset="-120"/>
+                </a:rPr>
+                <a:t> the smaller element to the output.</a:t>
+              </a:r>
+              <a:endParaRPr lang="en-US" sz="1450" dirty="0"/>
+            </a:p>
+          </p:txBody>
+        </p:sp>
+        <p:grpSp>
+          <p:nvGrpSpPr>
+            <p:cNvPr id="43" name="Group 42">
+              <a:extLst>
+                <a:ext uri="{FF2B5EF4-FFF2-40B4-BE49-F238E27FC236}">
+                  <a16:creationId xmlns:a16="http://schemas.microsoft.com/office/drawing/2014/main" id="{A34BF55F-0BB3-49EC-9A1C-AF591C8F962D}"/>
+                </a:ext>
+              </a:extLst>
+            </p:cNvPr>
+            <p:cNvGrpSpPr/>
+            <p:nvPr/>
+          </p:nvGrpSpPr>
+          <p:grpSpPr>
+            <a:xfrm>
+              <a:off x="457189" y="3199904"/>
+              <a:ext cx="826769" cy="323552"/>
+              <a:chOff x="457189" y="3199904"/>
+              <a:chExt cx="826769" cy="323552"/>
+            </a:xfrm>
+          </p:grpSpPr>
+          <p:sp>
+            <p:nvSpPr>
+              <p:cNvPr id="10" name="Shape 8"/>
+              <p:cNvSpPr/>
+              <p:nvPr/>
+            </p:nvSpPr>
+            <p:spPr>
+              <a:xfrm>
+                <a:off x="457189" y="3199904"/>
+                <a:ext cx="323544" cy="323552"/>
+              </a:xfrm>
+              <a:prstGeom prst="roundRect">
+                <a:avLst>
+                  <a:gd name="adj" fmla="val 17148"/>
+                </a:avLst>
+              </a:prstGeom>
+              <a:solidFill>
+                <a:srgbClr val="A2CF51"/>
+              </a:solidFill>
+              <a:ln w="6350">
                 <a:solidFill>
-                  <a:srgbClr val="000000"/>
+                  <a:srgbClr val="D3CEBA"/>
                 </a:solidFill>
-                <a:latin typeface="IBM Plex Sans" pitchFamily="34" charset="0"/>
-                <a:ea typeface="IBM Plex Sans" pitchFamily="34" charset="-122"/>
-                <a:cs typeface="IBM Plex Sans" pitchFamily="34" charset="-120"/>
-              </a:rPr>
-              <a:t>[27] + [43] → </a:t>
-            </a:r>
-            <a:r>
-              <a:rPr lang="en-US" sz="1550" b="1" dirty="0">
+                <a:prstDash val="solid"/>
+              </a:ln>
+            </p:spPr>
+          </p:sp>
+          <p:sp>
+            <p:nvSpPr>
+              <p:cNvPr id="11" name="Text 9"/>
+              <p:cNvSpPr/>
+              <p:nvPr/>
+            </p:nvSpPr>
+            <p:spPr>
+              <a:xfrm>
+                <a:off x="563449" y="3269159"/>
+                <a:ext cx="720509" cy="184944"/>
+              </a:xfrm>
+              <a:prstGeom prst="rect">
+                <a:avLst/>
+              </a:prstGeom>
+              <a:noFill/>
+              <a:ln/>
+            </p:spPr>
+            <p:txBody>
+              <a:bodyPr wrap="none" lIns="0" tIns="0" rIns="0" bIns="0" rtlCol="0" anchor="t"/>
+              <a:lstStyle/>
+              <a:p>
+                <a:pPr marL="0" indent="0" algn="l">
+                  <a:lnSpc>
+                    <a:spcPct val="83000"/>
+                  </a:lnSpc>
+                  <a:buNone/>
+                </a:pPr>
+                <a:r>
+                  <a:rPr lang="en-US" sz="1450" dirty="0">
+                    <a:solidFill>
+                      <a:srgbClr val="000000"/>
+                    </a:solidFill>
+                    <a:latin typeface="IBM Plex Sans SemiBold" pitchFamily="34" charset="0"/>
+                    <a:ea typeface="IBM Plex Sans SemiBold" pitchFamily="34" charset="-122"/>
+                    <a:cs typeface="IBM Plex Sans SemiBold" pitchFamily="34" charset="-120"/>
+                  </a:rPr>
+                  <a:t>3</a:t>
+                </a:r>
+                <a:endParaRPr lang="en-US" sz="1450" dirty="0"/>
+              </a:p>
+            </p:txBody>
+          </p:sp>
+        </p:grpSp>
+        <p:sp>
+          <p:nvSpPr>
+            <p:cNvPr id="12" name="Text 10"/>
+            <p:cNvSpPr/>
+            <p:nvPr/>
+          </p:nvSpPr>
+          <p:spPr>
+            <a:xfrm>
+              <a:off x="965573" y="3255108"/>
+              <a:ext cx="5709400" cy="240308"/>
+            </a:xfrm>
+            <a:prstGeom prst="rect">
+              <a:avLst/>
+            </a:prstGeom>
+            <a:noFill/>
+            <a:ln/>
+          </p:spPr>
+          <p:txBody>
+            <a:bodyPr wrap="none" lIns="0" tIns="0" rIns="0" bIns="0" rtlCol="0" anchor="t"/>
+            <a:lstStyle/>
+            <a:p>
+              <a:pPr marL="0" indent="0" algn="l">
+                <a:lnSpc>
+                  <a:spcPct val="108000"/>
+                </a:lnSpc>
+                <a:buNone/>
+              </a:pPr>
+              <a:r>
+                <a:rPr lang="en-US" sz="1450" dirty="0">
+                  <a:solidFill>
+                    <a:srgbClr val="4D5B42"/>
+                  </a:solidFill>
+                  <a:latin typeface="IBM Plex Sans" pitchFamily="34" charset="0"/>
+                  <a:ea typeface="IBM Plex Sans" pitchFamily="34" charset="-122"/>
+                  <a:cs typeface="IBM Plex Sans" pitchFamily="34" charset="-120"/>
+                </a:rPr>
+                <a:t>Advance the pointer in the selected subarray.</a:t>
+              </a:r>
+              <a:endParaRPr lang="en-US" sz="1450" dirty="0"/>
+            </a:p>
+          </p:txBody>
+        </p:sp>
+        <p:sp>
+          <p:nvSpPr>
+            <p:cNvPr id="15" name="Text 13"/>
+            <p:cNvSpPr/>
+            <p:nvPr/>
+          </p:nvSpPr>
+          <p:spPr>
+            <a:xfrm>
+              <a:off x="965573" y="4131805"/>
+              <a:ext cx="5709400" cy="240308"/>
+            </a:xfrm>
+            <a:prstGeom prst="rect">
+              <a:avLst/>
+            </a:prstGeom>
+            <a:noFill/>
+            <a:ln/>
+          </p:spPr>
+          <p:txBody>
+            <a:bodyPr wrap="none" lIns="0" tIns="0" rIns="0" bIns="0" rtlCol="0" anchor="t"/>
+            <a:lstStyle/>
+            <a:p>
+              <a:pPr marL="0" indent="0" algn="l">
+                <a:lnSpc>
+                  <a:spcPct val="108000"/>
+                </a:lnSpc>
+                <a:buNone/>
+              </a:pPr>
+              <a:r>
+                <a:rPr lang="en-US" sz="1450" dirty="0">
+                  <a:solidFill>
+                    <a:srgbClr val="4D5B42"/>
+                  </a:solidFill>
+                  <a:latin typeface="IBM Plex Sans" pitchFamily="34" charset="0"/>
+                  <a:ea typeface="IBM Plex Sans" pitchFamily="34" charset="-122"/>
+                  <a:cs typeface="IBM Plex Sans" pitchFamily="34" charset="-120"/>
+                </a:rPr>
+                <a:t>Continue until one subarray is empty.</a:t>
+              </a:r>
+              <a:endParaRPr lang="en-US" sz="1450" dirty="0"/>
+            </a:p>
+          </p:txBody>
+        </p:sp>
+        <p:grpSp>
+          <p:nvGrpSpPr>
+            <p:cNvPr id="46" name="Group 45">
+              <a:extLst>
+                <a:ext uri="{FF2B5EF4-FFF2-40B4-BE49-F238E27FC236}">
+                  <a16:creationId xmlns:a16="http://schemas.microsoft.com/office/drawing/2014/main" id="{6605A3B3-7826-B4D5-ACC6-CFC04A279A9E}"/>
+                </a:ext>
+              </a:extLst>
+            </p:cNvPr>
+            <p:cNvGrpSpPr/>
+            <p:nvPr/>
+          </p:nvGrpSpPr>
+          <p:grpSpPr>
+            <a:xfrm>
+              <a:off x="457189" y="4953298"/>
+              <a:ext cx="826769" cy="323552"/>
+              <a:chOff x="457189" y="4953298"/>
+              <a:chExt cx="826769" cy="323552"/>
+            </a:xfrm>
+          </p:grpSpPr>
+          <p:sp>
+            <p:nvSpPr>
+              <p:cNvPr id="16" name="Shape 14"/>
+              <p:cNvSpPr/>
+              <p:nvPr/>
+            </p:nvSpPr>
+            <p:spPr>
+              <a:xfrm>
+                <a:off x="457189" y="4953298"/>
+                <a:ext cx="323544" cy="323552"/>
+              </a:xfrm>
+              <a:prstGeom prst="roundRect">
+                <a:avLst>
+                  <a:gd name="adj" fmla="val 17148"/>
+                </a:avLst>
+              </a:prstGeom>
+              <a:solidFill>
+                <a:srgbClr val="A2CF51"/>
+              </a:solidFill>
+              <a:ln w="6350">
                 <a:solidFill>
-                  <a:srgbClr val="000000"/>
+                  <a:srgbClr val="D3CEBA"/>
                 </a:solidFill>
-                <a:latin typeface="IBM Plex Sans Bold" pitchFamily="34" charset="0"/>
-                <a:ea typeface="IBM Plex Sans Bold" pitchFamily="34" charset="-122"/>
-                <a:cs typeface="IBM Plex Sans Bold" pitchFamily="34" charset="-120"/>
-              </a:rPr>
-              <a:t>[27, 43]</a:t>
-            </a:r>
-            <a:endParaRPr lang="en-US" sz="1550" dirty="0"/>
-          </a:p>
-        </p:txBody>
-      </p:sp>
-      <p:sp>
-        <p:nvSpPr>
-          <p:cNvPr id="34" name="Shape 32"/>
-          <p:cNvSpPr/>
-          <p:nvPr/>
-        </p:nvSpPr>
-        <p:spPr>
-          <a:xfrm>
-            <a:off x="8178290" y="5717519"/>
-            <a:ext cx="3555911" cy="894092"/>
-          </a:xfrm>
-          <a:prstGeom prst="rect">
-            <a:avLst/>
-          </a:prstGeom>
-          <a:solidFill>
-            <a:srgbClr val="E94B55"/>
-          </a:solidFill>
-          <a:ln/>
-        </p:spPr>
-        <p:txBody>
-          <a:bodyPr/>
-          <a:lstStyle/>
-          <a:p>
-            <a:endParaRPr lang="en-IN" dirty="0"/>
-          </a:p>
-        </p:txBody>
-      </p:sp>
-      <p:sp>
-        <p:nvSpPr>
-          <p:cNvPr id="35" name="Text 33"/>
-          <p:cNvSpPr/>
-          <p:nvPr/>
-        </p:nvSpPr>
-        <p:spPr>
-          <a:xfrm>
-            <a:off x="8301150" y="6055902"/>
-            <a:ext cx="3433357" cy="508992"/>
-          </a:xfrm>
-          <a:prstGeom prst="rect">
-            <a:avLst/>
-          </a:prstGeom>
-          <a:noFill/>
-          <a:ln/>
-        </p:spPr>
-        <p:txBody>
-          <a:bodyPr wrap="square" lIns="0" tIns="0" rIns="0" bIns="0" rtlCol="0" anchor="t">
-            <a:normAutofit/>
-          </a:bodyPr>
-          <a:lstStyle/>
-          <a:p>
-            <a:pPr marL="0" indent="0" algn="l">
-              <a:lnSpc>
-                <a:spcPct val="108000"/>
-              </a:lnSpc>
-              <a:buNone/>
-            </a:pPr>
-            <a:r>
-              <a:rPr lang="en-US" sz="1550" dirty="0">
-                <a:solidFill>
-                  <a:srgbClr val="000000"/>
-                </a:solidFill>
-                <a:latin typeface="IBM Plex Sans" pitchFamily="34" charset="0"/>
-                <a:ea typeface="IBM Plex Sans" pitchFamily="34" charset="-122"/>
-                <a:cs typeface="IBM Plex Sans" pitchFamily="34" charset="-120"/>
-              </a:rPr>
-              <a:t>[12, 38] + [27, 43] → </a:t>
-            </a:r>
-            <a:r>
-              <a:rPr lang="en-US" sz="1550" b="1" dirty="0">
-                <a:solidFill>
-                  <a:srgbClr val="000000"/>
-                </a:solidFill>
-                <a:latin typeface="IBM Plex Sans Bold" pitchFamily="34" charset="0"/>
-                <a:ea typeface="IBM Plex Sans Bold" pitchFamily="34" charset="-122"/>
-                <a:cs typeface="IBM Plex Sans Bold" pitchFamily="34" charset="-120"/>
-              </a:rPr>
-              <a:t>[12, 27, 38, 43]</a:t>
-            </a:r>
-            <a:endParaRPr lang="en-US" sz="1550" dirty="0"/>
-          </a:p>
-        </p:txBody>
-      </p:sp>
-      <p:sp>
-        <p:nvSpPr>
-          <p:cNvPr id="36" name="Shape 34"/>
-          <p:cNvSpPr/>
-          <p:nvPr/>
-        </p:nvSpPr>
-        <p:spPr>
-          <a:xfrm>
-            <a:off x="457189" y="2094359"/>
-            <a:ext cx="6217784" cy="12700"/>
-          </a:xfrm>
-          <a:prstGeom prst="rect">
-            <a:avLst/>
-          </a:prstGeom>
-          <a:solidFill>
-            <a:srgbClr val="4D5B42"/>
-          </a:solidFill>
-          <a:ln/>
-        </p:spPr>
-      </p:sp>
-      <p:sp>
-        <p:nvSpPr>
-          <p:cNvPr id="37" name="Shape 35"/>
-          <p:cNvSpPr/>
-          <p:nvPr/>
-        </p:nvSpPr>
-        <p:spPr>
-          <a:xfrm>
-            <a:off x="457189" y="2987479"/>
-            <a:ext cx="6217784" cy="12700"/>
-          </a:xfrm>
-          <a:prstGeom prst="rect">
-            <a:avLst/>
-          </a:prstGeom>
-          <a:solidFill>
-            <a:srgbClr val="4D5B42"/>
-          </a:solidFill>
-          <a:ln/>
-        </p:spPr>
-      </p:sp>
-      <p:sp>
-        <p:nvSpPr>
-          <p:cNvPr id="38" name="Shape 36"/>
-          <p:cNvSpPr/>
-          <p:nvPr/>
-        </p:nvSpPr>
-        <p:spPr>
-          <a:xfrm>
-            <a:off x="457188" y="3875881"/>
-            <a:ext cx="6217784" cy="12700"/>
-          </a:xfrm>
-          <a:prstGeom prst="rect">
-            <a:avLst/>
-          </a:prstGeom>
-          <a:solidFill>
-            <a:srgbClr val="4D5B42"/>
-          </a:solidFill>
-          <a:ln/>
-        </p:spPr>
-      </p:sp>
-      <p:sp>
-        <p:nvSpPr>
-          <p:cNvPr id="39" name="Shape 37"/>
-          <p:cNvSpPr/>
-          <p:nvPr/>
-        </p:nvSpPr>
-        <p:spPr>
-          <a:xfrm>
-            <a:off x="457189" y="4740791"/>
-            <a:ext cx="6217784" cy="12700"/>
-          </a:xfrm>
-          <a:prstGeom prst="rect">
-            <a:avLst/>
-          </a:prstGeom>
-          <a:solidFill>
-            <a:srgbClr val="F7F4E8"/>
-          </a:solidFill>
-          <a:ln w="6350">
+                <a:prstDash val="solid"/>
+              </a:ln>
+            </p:spPr>
+          </p:sp>
+          <p:sp>
+            <p:nvSpPr>
+              <p:cNvPr id="17" name="Text 15"/>
+              <p:cNvSpPr/>
+              <p:nvPr/>
+            </p:nvSpPr>
+            <p:spPr>
+              <a:xfrm>
+                <a:off x="563449" y="5022552"/>
+                <a:ext cx="720509" cy="184944"/>
+              </a:xfrm>
+              <a:prstGeom prst="rect">
+                <a:avLst/>
+              </a:prstGeom>
+              <a:noFill/>
+              <a:ln/>
+            </p:spPr>
+            <p:txBody>
+              <a:bodyPr wrap="none" lIns="0" tIns="0" rIns="0" bIns="0" rtlCol="0" anchor="t"/>
+              <a:lstStyle/>
+              <a:p>
+                <a:pPr marL="0" indent="0" algn="l">
+                  <a:lnSpc>
+                    <a:spcPct val="83000"/>
+                  </a:lnSpc>
+                  <a:buNone/>
+                </a:pPr>
+                <a:r>
+                  <a:rPr lang="en-US" sz="1450" dirty="0">
+                    <a:solidFill>
+                      <a:srgbClr val="000000"/>
+                    </a:solidFill>
+                    <a:latin typeface="IBM Plex Sans SemiBold" pitchFamily="34" charset="0"/>
+                    <a:ea typeface="IBM Plex Sans SemiBold" pitchFamily="34" charset="-122"/>
+                    <a:cs typeface="IBM Plex Sans SemiBold" pitchFamily="34" charset="-120"/>
+                  </a:rPr>
+                  <a:t>5</a:t>
+                </a:r>
+                <a:endParaRPr lang="en-US" sz="1450" dirty="0"/>
+              </a:p>
+            </p:txBody>
+          </p:sp>
+        </p:grpSp>
+        <p:sp>
+          <p:nvSpPr>
+            <p:cNvPr id="18" name="Text 16"/>
+            <p:cNvSpPr/>
+            <p:nvPr/>
+          </p:nvSpPr>
+          <p:spPr>
+            <a:xfrm>
+              <a:off x="965573" y="5008502"/>
+              <a:ext cx="5709400" cy="240308"/>
+            </a:xfrm>
+            <a:prstGeom prst="rect">
+              <a:avLst/>
+            </a:prstGeom>
+            <a:noFill/>
+            <a:ln/>
+          </p:spPr>
+          <p:txBody>
+            <a:bodyPr wrap="none" lIns="0" tIns="0" rIns="0" bIns="0" rtlCol="0" anchor="t"/>
+            <a:lstStyle/>
+            <a:p>
+              <a:pPr marL="0" indent="0" algn="l">
+                <a:lnSpc>
+                  <a:spcPct val="108000"/>
+                </a:lnSpc>
+                <a:buNone/>
+              </a:pPr>
+              <a:r>
+                <a:rPr lang="en-US" sz="1450" b="1" dirty="0">
+                  <a:solidFill>
+                    <a:srgbClr val="4D5B42"/>
+                  </a:solidFill>
+                  <a:latin typeface="IBM Plex Sans" pitchFamily="34" charset="0"/>
+                  <a:ea typeface="IBM Plex Sans" pitchFamily="34" charset="-122"/>
+                  <a:cs typeface="IBM Plex Sans" pitchFamily="34" charset="-120"/>
+                </a:rPr>
+                <a:t>Append</a:t>
+              </a:r>
+              <a:r>
+                <a:rPr lang="en-US" sz="1450" dirty="0">
+                  <a:solidFill>
+                    <a:srgbClr val="4D5B42"/>
+                  </a:solidFill>
+                  <a:latin typeface="IBM Plex Sans" pitchFamily="34" charset="0"/>
+                  <a:ea typeface="IBM Plex Sans" pitchFamily="34" charset="-122"/>
+                  <a:cs typeface="IBM Plex Sans" pitchFamily="34" charset="-120"/>
+                </a:rPr>
+                <a:t> the remaining elements.</a:t>
+              </a:r>
+              <a:endParaRPr lang="en-US" sz="1450" dirty="0"/>
+            </a:p>
+          </p:txBody>
+        </p:sp>
+        <p:sp>
+          <p:nvSpPr>
+            <p:cNvPr id="36" name="Shape 34"/>
+            <p:cNvSpPr/>
+            <p:nvPr/>
+          </p:nvSpPr>
+          <p:spPr>
+            <a:xfrm>
+              <a:off x="457189" y="2094359"/>
+              <a:ext cx="6217784" cy="12700"/>
+            </a:xfrm>
+            <a:prstGeom prst="rect">
+              <a:avLst/>
+            </a:prstGeom>
             <a:solidFill>
-              <a:schemeClr val="tx1"/>
+              <a:srgbClr val="4D5B42"/>
             </a:solidFill>
-          </a:ln>
-        </p:spPr>
-      </p:sp>
+            <a:ln/>
+          </p:spPr>
+        </p:sp>
+        <p:sp>
+          <p:nvSpPr>
+            <p:cNvPr id="37" name="Shape 35"/>
+            <p:cNvSpPr/>
+            <p:nvPr/>
+          </p:nvSpPr>
+          <p:spPr>
+            <a:xfrm>
+              <a:off x="457189" y="2987479"/>
+              <a:ext cx="6217784" cy="12700"/>
+            </a:xfrm>
+            <a:prstGeom prst="rect">
+              <a:avLst/>
+            </a:prstGeom>
+            <a:solidFill>
+              <a:srgbClr val="4D5B42"/>
+            </a:solidFill>
+            <a:ln/>
+          </p:spPr>
+        </p:sp>
+        <p:sp>
+          <p:nvSpPr>
+            <p:cNvPr id="38" name="Shape 36"/>
+            <p:cNvSpPr/>
+            <p:nvPr/>
+          </p:nvSpPr>
+          <p:spPr>
+            <a:xfrm>
+              <a:off x="457188" y="3875881"/>
+              <a:ext cx="6217784" cy="12700"/>
+            </a:xfrm>
+            <a:prstGeom prst="rect">
+              <a:avLst/>
+            </a:prstGeom>
+            <a:solidFill>
+              <a:srgbClr val="4D5B42"/>
+            </a:solidFill>
+            <a:ln/>
+          </p:spPr>
+        </p:sp>
+        <p:sp>
+          <p:nvSpPr>
+            <p:cNvPr id="39" name="Shape 37"/>
+            <p:cNvSpPr/>
+            <p:nvPr/>
+          </p:nvSpPr>
+          <p:spPr>
+            <a:xfrm>
+              <a:off x="457189" y="4740791"/>
+              <a:ext cx="6217784" cy="12700"/>
+            </a:xfrm>
+            <a:prstGeom prst="rect">
+              <a:avLst/>
+            </a:prstGeom>
+            <a:solidFill>
+              <a:srgbClr val="F7F4E8"/>
+            </a:solidFill>
+            <a:ln w="6350">
+              <a:solidFill>
+                <a:schemeClr val="tx1"/>
+              </a:solidFill>
+            </a:ln>
+          </p:spPr>
+        </p:sp>
+      </p:grpSp>
       <p:sp>
         <p:nvSpPr>
           <p:cNvPr id="48" name="TextBox 47">
@@ -8355,6 +8451,49 @@
               <a:rPr lang="en-IN" dirty="0"/>
               <a:t>5</a:t>
             </a:r>
+          </a:p>
+        </p:txBody>
+      </p:sp>
+      <p:sp>
+        <p:nvSpPr>
+          <p:cNvPr id="54" name="TextBox 53">
+            <a:extLst>
+              <a:ext uri="{FF2B5EF4-FFF2-40B4-BE49-F238E27FC236}">
+                <a16:creationId xmlns:a16="http://schemas.microsoft.com/office/drawing/2014/main" id="{EDE83C00-14CA-192B-288D-D88B74FC28CC}"/>
+              </a:ext>
+            </a:extLst>
+          </p:cNvPr>
+          <p:cNvSpPr txBox="1"/>
+          <p:nvPr/>
+        </p:nvSpPr>
+        <p:spPr>
+          <a:xfrm>
+            <a:off x="5518833" y="6065704"/>
+            <a:ext cx="436206" cy="338554"/>
+          </a:xfrm>
+          <a:prstGeom prst="rect">
+            <a:avLst/>
+          </a:prstGeom>
+          <a:noFill/>
+        </p:spPr>
+        <p:txBody>
+          <a:bodyPr wrap="square">
+            <a:spAutoFit/>
+          </a:bodyPr>
+          <a:lstStyle/>
+          <a:p>
+            <a:r>
+              <a:rPr lang="en-US" sz="1600" dirty="0">
+                <a:solidFill>
+                  <a:srgbClr val="000000"/>
+                </a:solidFill>
+                <a:latin typeface="IBM Plex Sans" pitchFamily="34" charset="0"/>
+                <a:ea typeface="IBM Plex Sans" pitchFamily="34" charset="-122"/>
+                <a:cs typeface="IBM Plex Sans" pitchFamily="34" charset="-120"/>
+              </a:rPr>
+              <a:t>→</a:t>
+            </a:r>
+            <a:endParaRPr lang="en-IN" sz="1600" dirty="0"/>
           </a:p>
         </p:txBody>
       </p:sp>
